--- a/public/videos/repositories/content-brief-engine/content-brief-engine-tech-preview.pptx
+++ b/public/videos/repositories/content-brief-engine/content-brief-engine-tech-preview.pptx
@@ -134,7 +134,7 @@
           <p:cNvPr id="2" name="タイトル 1">
             <a:extLst>
               <a:ext uri="{FF2B5EF4-FFF2-40B4-BE49-F238E27FC236}">
-                <a16:creationId xmlns:a16="http://schemas.microsoft.com/office/drawing/2014/main" id="{DB8081A5-2DDB-62FA-DD56-6D778F1D811D}"/>
+                <a16:creationId xmlns:a16="http://schemas.microsoft.com/office/drawing/2014/main" id="{607AF04B-91A1-FDC8-5BD5-CA925AC46445}"/>
               </a:ext>
             </a:extLst>
           </p:cNvPr>
@@ -171,7 +171,7 @@
           <p:cNvPr id="3" name="字幕 2">
             <a:extLst>
               <a:ext uri="{FF2B5EF4-FFF2-40B4-BE49-F238E27FC236}">
-                <a16:creationId xmlns:a16="http://schemas.microsoft.com/office/drawing/2014/main" id="{3E6DCF13-0797-7434-AEAB-0CC85309C572}"/>
+                <a16:creationId xmlns:a16="http://schemas.microsoft.com/office/drawing/2014/main" id="{E9563EA5-7D71-9FB2-3086-21733483B86F}"/>
               </a:ext>
             </a:extLst>
           </p:cNvPr>
@@ -241,7 +241,7 @@
           <p:cNvPr id="4" name="日付プレースホルダー 3">
             <a:extLst>
               <a:ext uri="{FF2B5EF4-FFF2-40B4-BE49-F238E27FC236}">
-                <a16:creationId xmlns:a16="http://schemas.microsoft.com/office/drawing/2014/main" id="{5B084193-2BBE-0009-759B-65E8373A06C5}"/>
+                <a16:creationId xmlns:a16="http://schemas.microsoft.com/office/drawing/2014/main" id="{39183439-6DF0-8174-4D30-983270788B0F}"/>
               </a:ext>
             </a:extLst>
           </p:cNvPr>
@@ -257,7 +257,7 @@
           <a:bodyPr/>
           <a:lstStyle/>
           <a:p>
-            <a:fld id="{EC501055-3551-404D-B3E8-8524C3C433BC}" type="datetimeFigureOut">
+            <a:fld id="{E8AAB5B6-4AF6-43E0-B791-96E07B70AB54}" type="datetimeFigureOut">
               <a:rPr kumimoji="1" lang="ja-JP" altLang="en-US" smtClean="0"/>
               <a:t>2026/7/30</a:t>
             </a:fld>
@@ -270,7 +270,7 @@
           <p:cNvPr id="5" name="フッター プレースホルダー 4">
             <a:extLst>
               <a:ext uri="{FF2B5EF4-FFF2-40B4-BE49-F238E27FC236}">
-                <a16:creationId xmlns:a16="http://schemas.microsoft.com/office/drawing/2014/main" id="{775B9AE0-89D5-D411-5D06-AF79F9BBD110}"/>
+                <a16:creationId xmlns:a16="http://schemas.microsoft.com/office/drawing/2014/main" id="{3511CF9F-2285-89FE-1C27-87FCF3A73EB4}"/>
               </a:ext>
             </a:extLst>
           </p:cNvPr>
@@ -295,7 +295,7 @@
           <p:cNvPr id="6" name="スライド番号プレースホルダー 5">
             <a:extLst>
               <a:ext uri="{FF2B5EF4-FFF2-40B4-BE49-F238E27FC236}">
-                <a16:creationId xmlns:a16="http://schemas.microsoft.com/office/drawing/2014/main" id="{EAB449A1-FE5F-6180-0007-58C534B5D781}"/>
+                <a16:creationId xmlns:a16="http://schemas.microsoft.com/office/drawing/2014/main" id="{30B9E540-23B6-14D7-175F-10F5D53F5E4E}"/>
               </a:ext>
             </a:extLst>
           </p:cNvPr>
@@ -311,7 +311,7 @@
           <a:bodyPr/>
           <a:lstStyle/>
           <a:p>
-            <a:fld id="{2E95919E-94EC-4842-A925-71DBD672C39D}" type="slidenum">
+            <a:fld id="{FF1755AD-8A0F-43D9-9541-8FD2B9F1105B}" type="slidenum">
               <a:rPr kumimoji="1" lang="ja-JP" altLang="en-US" smtClean="0"/>
               <a:t>‹#›</a:t>
             </a:fld>
@@ -322,7 +322,7 @@
     </p:spTree>
     <p:extLst>
       <p:ext uri="{BB962C8B-B14F-4D97-AF65-F5344CB8AC3E}">
-        <p14:creationId xmlns:p14="http://schemas.microsoft.com/office/powerpoint/2010/main" val="1020495650"/>
+        <p14:creationId xmlns:p14="http://schemas.microsoft.com/office/powerpoint/2010/main" val="2593298886"/>
       </p:ext>
     </p:extLst>
   </p:cSld>
@@ -354,7 +354,7 @@
           <p:cNvPr id="2" name="タイトル 1">
             <a:extLst>
               <a:ext uri="{FF2B5EF4-FFF2-40B4-BE49-F238E27FC236}">
-                <a16:creationId xmlns:a16="http://schemas.microsoft.com/office/drawing/2014/main" id="{DDBB0319-92E9-4C29-04F8-C8E7B035B567}"/>
+                <a16:creationId xmlns:a16="http://schemas.microsoft.com/office/drawing/2014/main" id="{74EFD54E-397D-B1F3-9F14-3855571D766C}"/>
               </a:ext>
             </a:extLst>
           </p:cNvPr>
@@ -382,7 +382,7 @@
           <p:cNvPr id="3" name="縦書きテキスト プレースホルダー 2">
             <a:extLst>
               <a:ext uri="{FF2B5EF4-FFF2-40B4-BE49-F238E27FC236}">
-                <a16:creationId xmlns:a16="http://schemas.microsoft.com/office/drawing/2014/main" id="{DD180164-E5D4-B097-0A06-4E7ECDADBDB3}"/>
+                <a16:creationId xmlns:a16="http://schemas.microsoft.com/office/drawing/2014/main" id="{4194C13F-BB70-C7AA-2B14-9D8069492802}"/>
               </a:ext>
             </a:extLst>
           </p:cNvPr>
@@ -471,7 +471,7 @@
           <p:cNvPr id="4" name="日付プレースホルダー 3">
             <a:extLst>
               <a:ext uri="{FF2B5EF4-FFF2-40B4-BE49-F238E27FC236}">
-                <a16:creationId xmlns:a16="http://schemas.microsoft.com/office/drawing/2014/main" id="{CDD0CA67-3E06-0226-EF0F-D429F816A218}"/>
+                <a16:creationId xmlns:a16="http://schemas.microsoft.com/office/drawing/2014/main" id="{8E10E7F9-27D9-566C-B39F-ABAFB9544C5C}"/>
               </a:ext>
             </a:extLst>
           </p:cNvPr>
@@ -487,7 +487,7 @@
           <a:bodyPr/>
           <a:lstStyle/>
           <a:p>
-            <a:fld id="{EC501055-3551-404D-B3E8-8524C3C433BC}" type="datetimeFigureOut">
+            <a:fld id="{E8AAB5B6-4AF6-43E0-B791-96E07B70AB54}" type="datetimeFigureOut">
               <a:rPr kumimoji="1" lang="ja-JP" altLang="en-US" smtClean="0"/>
               <a:t>2026/7/30</a:t>
             </a:fld>
@@ -500,7 +500,7 @@
           <p:cNvPr id="5" name="フッター プレースホルダー 4">
             <a:extLst>
               <a:ext uri="{FF2B5EF4-FFF2-40B4-BE49-F238E27FC236}">
-                <a16:creationId xmlns:a16="http://schemas.microsoft.com/office/drawing/2014/main" id="{8FC6D631-CF55-7FDA-EE4D-265070F30424}"/>
+                <a16:creationId xmlns:a16="http://schemas.microsoft.com/office/drawing/2014/main" id="{990A7B6A-C597-DF97-1188-58C43B14892A}"/>
               </a:ext>
             </a:extLst>
           </p:cNvPr>
@@ -525,7 +525,7 @@
           <p:cNvPr id="6" name="スライド番号プレースホルダー 5">
             <a:extLst>
               <a:ext uri="{FF2B5EF4-FFF2-40B4-BE49-F238E27FC236}">
-                <a16:creationId xmlns:a16="http://schemas.microsoft.com/office/drawing/2014/main" id="{5A887368-293A-E7A6-2359-93AAACB62BC6}"/>
+                <a16:creationId xmlns:a16="http://schemas.microsoft.com/office/drawing/2014/main" id="{F803ABC4-0333-7CE0-8CCD-88528DFB82B6}"/>
               </a:ext>
             </a:extLst>
           </p:cNvPr>
@@ -541,7 +541,7 @@
           <a:bodyPr/>
           <a:lstStyle/>
           <a:p>
-            <a:fld id="{2E95919E-94EC-4842-A925-71DBD672C39D}" type="slidenum">
+            <a:fld id="{FF1755AD-8A0F-43D9-9541-8FD2B9F1105B}" type="slidenum">
               <a:rPr kumimoji="1" lang="ja-JP" altLang="en-US" smtClean="0"/>
               <a:t>‹#›</a:t>
             </a:fld>
@@ -552,7 +552,7 @@
     </p:spTree>
     <p:extLst>
       <p:ext uri="{BB962C8B-B14F-4D97-AF65-F5344CB8AC3E}">
-        <p14:creationId xmlns:p14="http://schemas.microsoft.com/office/powerpoint/2010/main" val="1316310605"/>
+        <p14:creationId xmlns:p14="http://schemas.microsoft.com/office/powerpoint/2010/main" val="856773157"/>
       </p:ext>
     </p:extLst>
   </p:cSld>
@@ -584,7 +584,7 @@
           <p:cNvPr id="2" name="縦書きタイトル 1">
             <a:extLst>
               <a:ext uri="{FF2B5EF4-FFF2-40B4-BE49-F238E27FC236}">
-                <a16:creationId xmlns:a16="http://schemas.microsoft.com/office/drawing/2014/main" id="{C89DEE2A-1A63-FD69-620E-8437A736FDCA}"/>
+                <a16:creationId xmlns:a16="http://schemas.microsoft.com/office/drawing/2014/main" id="{6C3AF06D-A71C-7B31-837A-84303B841B31}"/>
               </a:ext>
             </a:extLst>
           </p:cNvPr>
@@ -617,7 +617,7 @@
           <p:cNvPr id="3" name="縦書きテキスト プレースホルダー 2">
             <a:extLst>
               <a:ext uri="{FF2B5EF4-FFF2-40B4-BE49-F238E27FC236}">
-                <a16:creationId xmlns:a16="http://schemas.microsoft.com/office/drawing/2014/main" id="{E0F469C5-6A0A-4828-4A18-926A13B7D0F7}"/>
+                <a16:creationId xmlns:a16="http://schemas.microsoft.com/office/drawing/2014/main" id="{488EC43D-31BF-A607-756B-82299166D0B0}"/>
               </a:ext>
             </a:extLst>
           </p:cNvPr>
@@ -711,7 +711,7 @@
           <p:cNvPr id="4" name="日付プレースホルダー 3">
             <a:extLst>
               <a:ext uri="{FF2B5EF4-FFF2-40B4-BE49-F238E27FC236}">
-                <a16:creationId xmlns:a16="http://schemas.microsoft.com/office/drawing/2014/main" id="{84AFEBE3-9465-5651-BB74-4C85F1A3C3B7}"/>
+                <a16:creationId xmlns:a16="http://schemas.microsoft.com/office/drawing/2014/main" id="{36F917DE-24C6-DB26-1827-746F0AB7E036}"/>
               </a:ext>
             </a:extLst>
           </p:cNvPr>
@@ -727,7 +727,7 @@
           <a:bodyPr/>
           <a:lstStyle/>
           <a:p>
-            <a:fld id="{EC501055-3551-404D-B3E8-8524C3C433BC}" type="datetimeFigureOut">
+            <a:fld id="{E8AAB5B6-4AF6-43E0-B791-96E07B70AB54}" type="datetimeFigureOut">
               <a:rPr kumimoji="1" lang="ja-JP" altLang="en-US" smtClean="0"/>
               <a:t>2026/7/30</a:t>
             </a:fld>
@@ -740,7 +740,7 @@
           <p:cNvPr id="5" name="フッター プレースホルダー 4">
             <a:extLst>
               <a:ext uri="{FF2B5EF4-FFF2-40B4-BE49-F238E27FC236}">
-                <a16:creationId xmlns:a16="http://schemas.microsoft.com/office/drawing/2014/main" id="{7B10E825-665E-7B14-7073-EA9AE8DB674C}"/>
+                <a16:creationId xmlns:a16="http://schemas.microsoft.com/office/drawing/2014/main" id="{086D9816-D9EB-C2BE-B5CF-1C69BB46EF3F}"/>
               </a:ext>
             </a:extLst>
           </p:cNvPr>
@@ -765,7 +765,7 @@
           <p:cNvPr id="6" name="スライド番号プレースホルダー 5">
             <a:extLst>
               <a:ext uri="{FF2B5EF4-FFF2-40B4-BE49-F238E27FC236}">
-                <a16:creationId xmlns:a16="http://schemas.microsoft.com/office/drawing/2014/main" id="{03FA6CBB-94FA-4892-9BF3-CE426C7ACD13}"/>
+                <a16:creationId xmlns:a16="http://schemas.microsoft.com/office/drawing/2014/main" id="{DD54DFAA-7E2B-D49F-7C5B-8C3827A2F902}"/>
               </a:ext>
             </a:extLst>
           </p:cNvPr>
@@ -781,7 +781,7 @@
           <a:bodyPr/>
           <a:lstStyle/>
           <a:p>
-            <a:fld id="{2E95919E-94EC-4842-A925-71DBD672C39D}" type="slidenum">
+            <a:fld id="{FF1755AD-8A0F-43D9-9541-8FD2B9F1105B}" type="slidenum">
               <a:rPr kumimoji="1" lang="ja-JP" altLang="en-US" smtClean="0"/>
               <a:t>‹#›</a:t>
             </a:fld>
@@ -792,7 +792,7 @@
     </p:spTree>
     <p:extLst>
       <p:ext uri="{BB962C8B-B14F-4D97-AF65-F5344CB8AC3E}">
-        <p14:creationId xmlns:p14="http://schemas.microsoft.com/office/powerpoint/2010/main" val="4242173415"/>
+        <p14:creationId xmlns:p14="http://schemas.microsoft.com/office/powerpoint/2010/main" val="3481977879"/>
       </p:ext>
     </p:extLst>
   </p:cSld>
@@ -824,7 +824,7 @@
           <p:cNvPr id="2" name="タイトル 1">
             <a:extLst>
               <a:ext uri="{FF2B5EF4-FFF2-40B4-BE49-F238E27FC236}">
-                <a16:creationId xmlns:a16="http://schemas.microsoft.com/office/drawing/2014/main" id="{5E785201-D592-AD8A-ECA7-30B4E918B34D}"/>
+                <a16:creationId xmlns:a16="http://schemas.microsoft.com/office/drawing/2014/main" id="{B160679F-8E40-610C-B5D8-2EBCC3CBA4B0}"/>
               </a:ext>
             </a:extLst>
           </p:cNvPr>
@@ -852,7 +852,7 @@
           <p:cNvPr id="3" name="コンテンツ プレースホルダー 2">
             <a:extLst>
               <a:ext uri="{FF2B5EF4-FFF2-40B4-BE49-F238E27FC236}">
-                <a16:creationId xmlns:a16="http://schemas.microsoft.com/office/drawing/2014/main" id="{F7466A74-0F26-4A65-9AB6-EEB541EF1BCD}"/>
+                <a16:creationId xmlns:a16="http://schemas.microsoft.com/office/drawing/2014/main" id="{972D26B9-286D-556B-0B56-B47326359CED}"/>
               </a:ext>
             </a:extLst>
           </p:cNvPr>
@@ -941,7 +941,7 @@
           <p:cNvPr id="4" name="日付プレースホルダー 3">
             <a:extLst>
               <a:ext uri="{FF2B5EF4-FFF2-40B4-BE49-F238E27FC236}">
-                <a16:creationId xmlns:a16="http://schemas.microsoft.com/office/drawing/2014/main" id="{F4BBC872-1BB8-B1CF-711E-5E7E3C4D0E83}"/>
+                <a16:creationId xmlns:a16="http://schemas.microsoft.com/office/drawing/2014/main" id="{823C5A43-488C-E186-DC28-7C343C38EA56}"/>
               </a:ext>
             </a:extLst>
           </p:cNvPr>
@@ -957,7 +957,7 @@
           <a:bodyPr/>
           <a:lstStyle/>
           <a:p>
-            <a:fld id="{EC501055-3551-404D-B3E8-8524C3C433BC}" type="datetimeFigureOut">
+            <a:fld id="{E8AAB5B6-4AF6-43E0-B791-96E07B70AB54}" type="datetimeFigureOut">
               <a:rPr kumimoji="1" lang="ja-JP" altLang="en-US" smtClean="0"/>
               <a:t>2026/7/30</a:t>
             </a:fld>
@@ -970,7 +970,7 @@
           <p:cNvPr id="5" name="フッター プレースホルダー 4">
             <a:extLst>
               <a:ext uri="{FF2B5EF4-FFF2-40B4-BE49-F238E27FC236}">
-                <a16:creationId xmlns:a16="http://schemas.microsoft.com/office/drawing/2014/main" id="{F23DF605-2A14-3F66-D1D8-DF1276A9129A}"/>
+                <a16:creationId xmlns:a16="http://schemas.microsoft.com/office/drawing/2014/main" id="{2E7E7623-ACAF-7DE7-A2BC-6DECE6BF05C5}"/>
               </a:ext>
             </a:extLst>
           </p:cNvPr>
@@ -995,7 +995,7 @@
           <p:cNvPr id="6" name="スライド番号プレースホルダー 5">
             <a:extLst>
               <a:ext uri="{FF2B5EF4-FFF2-40B4-BE49-F238E27FC236}">
-                <a16:creationId xmlns:a16="http://schemas.microsoft.com/office/drawing/2014/main" id="{56627947-6C72-B389-7B27-794728CF7192}"/>
+                <a16:creationId xmlns:a16="http://schemas.microsoft.com/office/drawing/2014/main" id="{BDF95303-55A6-ED8F-9723-8286AB8BC7D2}"/>
               </a:ext>
             </a:extLst>
           </p:cNvPr>
@@ -1011,7 +1011,7 @@
           <a:bodyPr/>
           <a:lstStyle/>
           <a:p>
-            <a:fld id="{2E95919E-94EC-4842-A925-71DBD672C39D}" type="slidenum">
+            <a:fld id="{FF1755AD-8A0F-43D9-9541-8FD2B9F1105B}" type="slidenum">
               <a:rPr kumimoji="1" lang="ja-JP" altLang="en-US" smtClean="0"/>
               <a:t>‹#›</a:t>
             </a:fld>
@@ -1022,7 +1022,7 @@
     </p:spTree>
     <p:extLst>
       <p:ext uri="{BB962C8B-B14F-4D97-AF65-F5344CB8AC3E}">
-        <p14:creationId xmlns:p14="http://schemas.microsoft.com/office/powerpoint/2010/main" val="223288859"/>
+        <p14:creationId xmlns:p14="http://schemas.microsoft.com/office/powerpoint/2010/main" val="1498506394"/>
       </p:ext>
     </p:extLst>
   </p:cSld>
@@ -1054,7 +1054,7 @@
           <p:cNvPr id="2" name="タイトル 1">
             <a:extLst>
               <a:ext uri="{FF2B5EF4-FFF2-40B4-BE49-F238E27FC236}">
-                <a16:creationId xmlns:a16="http://schemas.microsoft.com/office/drawing/2014/main" id="{306EF90D-7602-358D-53C1-97F497A457F0}"/>
+                <a16:creationId xmlns:a16="http://schemas.microsoft.com/office/drawing/2014/main" id="{D797C549-3EF2-3B3A-F5DE-01A7FEF43756}"/>
               </a:ext>
             </a:extLst>
           </p:cNvPr>
@@ -1091,7 +1091,7 @@
           <p:cNvPr id="3" name="テキスト プレースホルダー 2">
             <a:extLst>
               <a:ext uri="{FF2B5EF4-FFF2-40B4-BE49-F238E27FC236}">
-                <a16:creationId xmlns:a16="http://schemas.microsoft.com/office/drawing/2014/main" id="{E91D5312-6F37-3ECA-89DA-6414264913F6}"/>
+                <a16:creationId xmlns:a16="http://schemas.microsoft.com/office/drawing/2014/main" id="{AB4343B4-C019-98C0-78FD-63C8E6E5BDBE}"/>
               </a:ext>
             </a:extLst>
           </p:cNvPr>
@@ -1216,7 +1216,7 @@
           <p:cNvPr id="4" name="日付プレースホルダー 3">
             <a:extLst>
               <a:ext uri="{FF2B5EF4-FFF2-40B4-BE49-F238E27FC236}">
-                <a16:creationId xmlns:a16="http://schemas.microsoft.com/office/drawing/2014/main" id="{2EFEBC16-D96D-536F-3694-FD10E1FF0EA2}"/>
+                <a16:creationId xmlns:a16="http://schemas.microsoft.com/office/drawing/2014/main" id="{623F1191-1732-57E7-3102-18B1F0F2823A}"/>
               </a:ext>
             </a:extLst>
           </p:cNvPr>
@@ -1232,7 +1232,7 @@
           <a:bodyPr/>
           <a:lstStyle/>
           <a:p>
-            <a:fld id="{EC501055-3551-404D-B3E8-8524C3C433BC}" type="datetimeFigureOut">
+            <a:fld id="{E8AAB5B6-4AF6-43E0-B791-96E07B70AB54}" type="datetimeFigureOut">
               <a:rPr kumimoji="1" lang="ja-JP" altLang="en-US" smtClean="0"/>
               <a:t>2026/7/30</a:t>
             </a:fld>
@@ -1245,7 +1245,7 @@
           <p:cNvPr id="5" name="フッター プレースホルダー 4">
             <a:extLst>
               <a:ext uri="{FF2B5EF4-FFF2-40B4-BE49-F238E27FC236}">
-                <a16:creationId xmlns:a16="http://schemas.microsoft.com/office/drawing/2014/main" id="{063EC87C-BD6A-A08F-7993-CD12923F3C78}"/>
+                <a16:creationId xmlns:a16="http://schemas.microsoft.com/office/drawing/2014/main" id="{5037AEE2-4603-FC81-430B-A32FD3DE1553}"/>
               </a:ext>
             </a:extLst>
           </p:cNvPr>
@@ -1270,7 +1270,7 @@
           <p:cNvPr id="6" name="スライド番号プレースホルダー 5">
             <a:extLst>
               <a:ext uri="{FF2B5EF4-FFF2-40B4-BE49-F238E27FC236}">
-                <a16:creationId xmlns:a16="http://schemas.microsoft.com/office/drawing/2014/main" id="{DF682974-2FEE-C9C6-345B-70589E6243F7}"/>
+                <a16:creationId xmlns:a16="http://schemas.microsoft.com/office/drawing/2014/main" id="{FDE74472-D6BF-9DE1-3F6A-361420C513BA}"/>
               </a:ext>
             </a:extLst>
           </p:cNvPr>
@@ -1286,7 +1286,7 @@
           <a:bodyPr/>
           <a:lstStyle/>
           <a:p>
-            <a:fld id="{2E95919E-94EC-4842-A925-71DBD672C39D}" type="slidenum">
+            <a:fld id="{FF1755AD-8A0F-43D9-9541-8FD2B9F1105B}" type="slidenum">
               <a:rPr kumimoji="1" lang="ja-JP" altLang="en-US" smtClean="0"/>
               <a:t>‹#›</a:t>
             </a:fld>
@@ -1297,7 +1297,7 @@
     </p:spTree>
     <p:extLst>
       <p:ext uri="{BB962C8B-B14F-4D97-AF65-F5344CB8AC3E}">
-        <p14:creationId xmlns:p14="http://schemas.microsoft.com/office/powerpoint/2010/main" val="2933685280"/>
+        <p14:creationId xmlns:p14="http://schemas.microsoft.com/office/powerpoint/2010/main" val="110766124"/>
       </p:ext>
     </p:extLst>
   </p:cSld>
@@ -1329,7 +1329,7 @@
           <p:cNvPr id="2" name="タイトル 1">
             <a:extLst>
               <a:ext uri="{FF2B5EF4-FFF2-40B4-BE49-F238E27FC236}">
-                <a16:creationId xmlns:a16="http://schemas.microsoft.com/office/drawing/2014/main" id="{04C28F6C-0F59-B4E7-DF39-4D915908A774}"/>
+                <a16:creationId xmlns:a16="http://schemas.microsoft.com/office/drawing/2014/main" id="{AB8E5A54-9570-4F98-7124-BCBAFE50A76E}"/>
               </a:ext>
             </a:extLst>
           </p:cNvPr>
@@ -1357,7 +1357,7 @@
           <p:cNvPr id="3" name="コンテンツ プレースホルダー 2">
             <a:extLst>
               <a:ext uri="{FF2B5EF4-FFF2-40B4-BE49-F238E27FC236}">
-                <a16:creationId xmlns:a16="http://schemas.microsoft.com/office/drawing/2014/main" id="{A9F619AD-6398-DAE3-6051-6062D3942E4D}"/>
+                <a16:creationId xmlns:a16="http://schemas.microsoft.com/office/drawing/2014/main" id="{66E3DF4C-BFCB-D826-F720-11EEAE16100E}"/>
               </a:ext>
             </a:extLst>
           </p:cNvPr>
@@ -1451,7 +1451,7 @@
           <p:cNvPr id="4" name="コンテンツ プレースホルダー 3">
             <a:extLst>
               <a:ext uri="{FF2B5EF4-FFF2-40B4-BE49-F238E27FC236}">
-                <a16:creationId xmlns:a16="http://schemas.microsoft.com/office/drawing/2014/main" id="{0F3E4E58-57B1-1B67-12DE-949408160E3F}"/>
+                <a16:creationId xmlns:a16="http://schemas.microsoft.com/office/drawing/2014/main" id="{FC821E92-7FBC-4D09-C632-E64ED65C4C3F}"/>
               </a:ext>
             </a:extLst>
           </p:cNvPr>
@@ -1545,7 +1545,7 @@
           <p:cNvPr id="5" name="日付プレースホルダー 4">
             <a:extLst>
               <a:ext uri="{FF2B5EF4-FFF2-40B4-BE49-F238E27FC236}">
-                <a16:creationId xmlns:a16="http://schemas.microsoft.com/office/drawing/2014/main" id="{6C4302D8-88BF-F8E6-6FDD-3CFE4E07CA4F}"/>
+                <a16:creationId xmlns:a16="http://schemas.microsoft.com/office/drawing/2014/main" id="{A80EA04E-4EA9-83F1-094A-139AA81C62A9}"/>
               </a:ext>
             </a:extLst>
           </p:cNvPr>
@@ -1561,7 +1561,7 @@
           <a:bodyPr/>
           <a:lstStyle/>
           <a:p>
-            <a:fld id="{EC501055-3551-404D-B3E8-8524C3C433BC}" type="datetimeFigureOut">
+            <a:fld id="{E8AAB5B6-4AF6-43E0-B791-96E07B70AB54}" type="datetimeFigureOut">
               <a:rPr kumimoji="1" lang="ja-JP" altLang="en-US" smtClean="0"/>
               <a:t>2026/7/30</a:t>
             </a:fld>
@@ -1574,7 +1574,7 @@
           <p:cNvPr id="6" name="フッター プレースホルダー 5">
             <a:extLst>
               <a:ext uri="{FF2B5EF4-FFF2-40B4-BE49-F238E27FC236}">
-                <a16:creationId xmlns:a16="http://schemas.microsoft.com/office/drawing/2014/main" id="{3EE40239-7A09-47C0-397B-78FFB19C507A}"/>
+                <a16:creationId xmlns:a16="http://schemas.microsoft.com/office/drawing/2014/main" id="{ECAE3FD2-DF51-922F-757D-631D4CAA7D09}"/>
               </a:ext>
             </a:extLst>
           </p:cNvPr>
@@ -1599,7 +1599,7 @@
           <p:cNvPr id="7" name="スライド番号プレースホルダー 6">
             <a:extLst>
               <a:ext uri="{FF2B5EF4-FFF2-40B4-BE49-F238E27FC236}">
-                <a16:creationId xmlns:a16="http://schemas.microsoft.com/office/drawing/2014/main" id="{3E1FDFAF-0DFF-C73C-38AA-CBBF30F8B0C7}"/>
+                <a16:creationId xmlns:a16="http://schemas.microsoft.com/office/drawing/2014/main" id="{C7C53735-E919-4216-CD01-A48F4E6F9916}"/>
               </a:ext>
             </a:extLst>
           </p:cNvPr>
@@ -1615,7 +1615,7 @@
           <a:bodyPr/>
           <a:lstStyle/>
           <a:p>
-            <a:fld id="{2E95919E-94EC-4842-A925-71DBD672C39D}" type="slidenum">
+            <a:fld id="{FF1755AD-8A0F-43D9-9541-8FD2B9F1105B}" type="slidenum">
               <a:rPr kumimoji="1" lang="ja-JP" altLang="en-US" smtClean="0"/>
               <a:t>‹#›</a:t>
             </a:fld>
@@ -1626,7 +1626,7 @@
     </p:spTree>
     <p:extLst>
       <p:ext uri="{BB962C8B-B14F-4D97-AF65-F5344CB8AC3E}">
-        <p14:creationId xmlns:p14="http://schemas.microsoft.com/office/powerpoint/2010/main" val="2075846280"/>
+        <p14:creationId xmlns:p14="http://schemas.microsoft.com/office/powerpoint/2010/main" val="4135944564"/>
       </p:ext>
     </p:extLst>
   </p:cSld>
@@ -1658,7 +1658,7 @@
           <p:cNvPr id="2" name="タイトル 1">
             <a:extLst>
               <a:ext uri="{FF2B5EF4-FFF2-40B4-BE49-F238E27FC236}">
-                <a16:creationId xmlns:a16="http://schemas.microsoft.com/office/drawing/2014/main" id="{B8DD5F2D-7711-61D7-ED53-8D1163EFC9F3}"/>
+                <a16:creationId xmlns:a16="http://schemas.microsoft.com/office/drawing/2014/main" id="{495F7008-18E2-C0B7-5526-8C0CCA35A3E6}"/>
               </a:ext>
             </a:extLst>
           </p:cNvPr>
@@ -1691,7 +1691,7 @@
           <p:cNvPr id="3" name="テキスト プレースホルダー 2">
             <a:extLst>
               <a:ext uri="{FF2B5EF4-FFF2-40B4-BE49-F238E27FC236}">
-                <a16:creationId xmlns:a16="http://schemas.microsoft.com/office/drawing/2014/main" id="{E53BFF63-6FEC-F1A5-93D2-9E6AE7EA14E3}"/>
+                <a16:creationId xmlns:a16="http://schemas.microsoft.com/office/drawing/2014/main" id="{A76E5613-8F5E-40E0-7C4A-D11DD089A9D5}"/>
               </a:ext>
             </a:extLst>
           </p:cNvPr>
@@ -1762,7 +1762,7 @@
           <p:cNvPr id="4" name="コンテンツ プレースホルダー 3">
             <a:extLst>
               <a:ext uri="{FF2B5EF4-FFF2-40B4-BE49-F238E27FC236}">
-                <a16:creationId xmlns:a16="http://schemas.microsoft.com/office/drawing/2014/main" id="{5F853D35-0C03-873D-1ED8-5A831123D1DB}"/>
+                <a16:creationId xmlns:a16="http://schemas.microsoft.com/office/drawing/2014/main" id="{CD91F5A8-D8C9-ED5D-1184-9C353E27C35A}"/>
               </a:ext>
             </a:extLst>
           </p:cNvPr>
@@ -1856,7 +1856,7 @@
           <p:cNvPr id="5" name="テキスト プレースホルダー 4">
             <a:extLst>
               <a:ext uri="{FF2B5EF4-FFF2-40B4-BE49-F238E27FC236}">
-                <a16:creationId xmlns:a16="http://schemas.microsoft.com/office/drawing/2014/main" id="{DD9232CF-9FD9-2A5B-DC3C-CD87D96BAC35}"/>
+                <a16:creationId xmlns:a16="http://schemas.microsoft.com/office/drawing/2014/main" id="{A42BC9E4-C9B3-9126-C2E4-3167DA4143A4}"/>
               </a:ext>
             </a:extLst>
           </p:cNvPr>
@@ -1927,7 +1927,7 @@
           <p:cNvPr id="6" name="コンテンツ プレースホルダー 5">
             <a:extLst>
               <a:ext uri="{FF2B5EF4-FFF2-40B4-BE49-F238E27FC236}">
-                <a16:creationId xmlns:a16="http://schemas.microsoft.com/office/drawing/2014/main" id="{3F40B1DE-1510-97E5-9834-380B1E69E924}"/>
+                <a16:creationId xmlns:a16="http://schemas.microsoft.com/office/drawing/2014/main" id="{541255F8-3A4C-3044-9ED5-C2654EE409D3}"/>
               </a:ext>
             </a:extLst>
           </p:cNvPr>
@@ -2021,7 +2021,7 @@
           <p:cNvPr id="7" name="日付プレースホルダー 6">
             <a:extLst>
               <a:ext uri="{FF2B5EF4-FFF2-40B4-BE49-F238E27FC236}">
-                <a16:creationId xmlns:a16="http://schemas.microsoft.com/office/drawing/2014/main" id="{3CE43C0A-0BFB-0A17-795D-AF6F8C031B54}"/>
+                <a16:creationId xmlns:a16="http://schemas.microsoft.com/office/drawing/2014/main" id="{C48052D0-4259-20CF-285D-E60AFF4B7D22}"/>
               </a:ext>
             </a:extLst>
           </p:cNvPr>
@@ -2037,7 +2037,7 @@
           <a:bodyPr/>
           <a:lstStyle/>
           <a:p>
-            <a:fld id="{EC501055-3551-404D-B3E8-8524C3C433BC}" type="datetimeFigureOut">
+            <a:fld id="{E8AAB5B6-4AF6-43E0-B791-96E07B70AB54}" type="datetimeFigureOut">
               <a:rPr kumimoji="1" lang="ja-JP" altLang="en-US" smtClean="0"/>
               <a:t>2026/7/30</a:t>
             </a:fld>
@@ -2050,7 +2050,7 @@
           <p:cNvPr id="8" name="フッター プレースホルダー 7">
             <a:extLst>
               <a:ext uri="{FF2B5EF4-FFF2-40B4-BE49-F238E27FC236}">
-                <a16:creationId xmlns:a16="http://schemas.microsoft.com/office/drawing/2014/main" id="{9D074A7A-EB28-03FA-784A-F33D58B888C7}"/>
+                <a16:creationId xmlns:a16="http://schemas.microsoft.com/office/drawing/2014/main" id="{3B0141B8-9C8F-FB8C-9F53-E7BEAADC7486}"/>
               </a:ext>
             </a:extLst>
           </p:cNvPr>
@@ -2075,7 +2075,7 @@
           <p:cNvPr id="9" name="スライド番号プレースホルダー 8">
             <a:extLst>
               <a:ext uri="{FF2B5EF4-FFF2-40B4-BE49-F238E27FC236}">
-                <a16:creationId xmlns:a16="http://schemas.microsoft.com/office/drawing/2014/main" id="{D4BBEE1C-A796-11DC-8FFC-F99483CBE389}"/>
+                <a16:creationId xmlns:a16="http://schemas.microsoft.com/office/drawing/2014/main" id="{036E84AA-45BB-A1B0-5C63-59C6713688D2}"/>
               </a:ext>
             </a:extLst>
           </p:cNvPr>
@@ -2091,7 +2091,7 @@
           <a:bodyPr/>
           <a:lstStyle/>
           <a:p>
-            <a:fld id="{2E95919E-94EC-4842-A925-71DBD672C39D}" type="slidenum">
+            <a:fld id="{FF1755AD-8A0F-43D9-9541-8FD2B9F1105B}" type="slidenum">
               <a:rPr kumimoji="1" lang="ja-JP" altLang="en-US" smtClean="0"/>
               <a:t>‹#›</a:t>
             </a:fld>
@@ -2102,7 +2102,7 @@
     </p:spTree>
     <p:extLst>
       <p:ext uri="{BB962C8B-B14F-4D97-AF65-F5344CB8AC3E}">
-        <p14:creationId xmlns:p14="http://schemas.microsoft.com/office/powerpoint/2010/main" val="1804581054"/>
+        <p14:creationId xmlns:p14="http://schemas.microsoft.com/office/powerpoint/2010/main" val="2176533091"/>
       </p:ext>
     </p:extLst>
   </p:cSld>
@@ -2134,7 +2134,7 @@
           <p:cNvPr id="2" name="タイトル 1">
             <a:extLst>
               <a:ext uri="{FF2B5EF4-FFF2-40B4-BE49-F238E27FC236}">
-                <a16:creationId xmlns:a16="http://schemas.microsoft.com/office/drawing/2014/main" id="{038C67CB-DC4C-067C-6A56-545E99457C70}"/>
+                <a16:creationId xmlns:a16="http://schemas.microsoft.com/office/drawing/2014/main" id="{6AA0241D-D372-ED69-9DE7-7A8561AE1C39}"/>
               </a:ext>
             </a:extLst>
           </p:cNvPr>
@@ -2162,7 +2162,7 @@
           <p:cNvPr id="3" name="日付プレースホルダー 2">
             <a:extLst>
               <a:ext uri="{FF2B5EF4-FFF2-40B4-BE49-F238E27FC236}">
-                <a16:creationId xmlns:a16="http://schemas.microsoft.com/office/drawing/2014/main" id="{410EE94F-7BA6-0F56-5F9C-CE60F261C352}"/>
+                <a16:creationId xmlns:a16="http://schemas.microsoft.com/office/drawing/2014/main" id="{3547341D-F0B3-1FC9-76AD-5742F9F965D7}"/>
               </a:ext>
             </a:extLst>
           </p:cNvPr>
@@ -2178,7 +2178,7 @@
           <a:bodyPr/>
           <a:lstStyle/>
           <a:p>
-            <a:fld id="{EC501055-3551-404D-B3E8-8524C3C433BC}" type="datetimeFigureOut">
+            <a:fld id="{E8AAB5B6-4AF6-43E0-B791-96E07B70AB54}" type="datetimeFigureOut">
               <a:rPr kumimoji="1" lang="ja-JP" altLang="en-US" smtClean="0"/>
               <a:t>2026/7/30</a:t>
             </a:fld>
@@ -2191,7 +2191,7 @@
           <p:cNvPr id="4" name="フッター プレースホルダー 3">
             <a:extLst>
               <a:ext uri="{FF2B5EF4-FFF2-40B4-BE49-F238E27FC236}">
-                <a16:creationId xmlns:a16="http://schemas.microsoft.com/office/drawing/2014/main" id="{21A0907A-D7C2-065D-E92F-35C0B18FCBF6}"/>
+                <a16:creationId xmlns:a16="http://schemas.microsoft.com/office/drawing/2014/main" id="{4CC3B2DF-4ECC-3424-B188-21A83A3001FF}"/>
               </a:ext>
             </a:extLst>
           </p:cNvPr>
@@ -2216,7 +2216,7 @@
           <p:cNvPr id="5" name="スライド番号プレースホルダー 4">
             <a:extLst>
               <a:ext uri="{FF2B5EF4-FFF2-40B4-BE49-F238E27FC236}">
-                <a16:creationId xmlns:a16="http://schemas.microsoft.com/office/drawing/2014/main" id="{C0132284-BD4D-4A97-54F1-5D99E8D9B9CD}"/>
+                <a16:creationId xmlns:a16="http://schemas.microsoft.com/office/drawing/2014/main" id="{7DFE80BC-0D6D-C041-CB90-0C46D159F2BE}"/>
               </a:ext>
             </a:extLst>
           </p:cNvPr>
@@ -2232,7 +2232,7 @@
           <a:bodyPr/>
           <a:lstStyle/>
           <a:p>
-            <a:fld id="{2E95919E-94EC-4842-A925-71DBD672C39D}" type="slidenum">
+            <a:fld id="{FF1755AD-8A0F-43D9-9541-8FD2B9F1105B}" type="slidenum">
               <a:rPr kumimoji="1" lang="ja-JP" altLang="en-US" smtClean="0"/>
               <a:t>‹#›</a:t>
             </a:fld>
@@ -2243,7 +2243,7 @@
     </p:spTree>
     <p:extLst>
       <p:ext uri="{BB962C8B-B14F-4D97-AF65-F5344CB8AC3E}">
-        <p14:creationId xmlns:p14="http://schemas.microsoft.com/office/powerpoint/2010/main" val="1456508370"/>
+        <p14:creationId xmlns:p14="http://schemas.microsoft.com/office/powerpoint/2010/main" val="2010908077"/>
       </p:ext>
     </p:extLst>
   </p:cSld>
@@ -2275,7 +2275,7 @@
           <p:cNvPr id="2" name="日付プレースホルダー 1">
             <a:extLst>
               <a:ext uri="{FF2B5EF4-FFF2-40B4-BE49-F238E27FC236}">
-                <a16:creationId xmlns:a16="http://schemas.microsoft.com/office/drawing/2014/main" id="{3253598D-9A3E-B81B-9B7F-346EB4302081}"/>
+                <a16:creationId xmlns:a16="http://schemas.microsoft.com/office/drawing/2014/main" id="{36284ACB-8088-23CD-F14C-8534BA676607}"/>
               </a:ext>
             </a:extLst>
           </p:cNvPr>
@@ -2291,7 +2291,7 @@
           <a:bodyPr/>
           <a:lstStyle/>
           <a:p>
-            <a:fld id="{EC501055-3551-404D-B3E8-8524C3C433BC}" type="datetimeFigureOut">
+            <a:fld id="{E8AAB5B6-4AF6-43E0-B791-96E07B70AB54}" type="datetimeFigureOut">
               <a:rPr kumimoji="1" lang="ja-JP" altLang="en-US" smtClean="0"/>
               <a:t>2026/7/30</a:t>
             </a:fld>
@@ -2304,7 +2304,7 @@
           <p:cNvPr id="3" name="フッター プレースホルダー 2">
             <a:extLst>
               <a:ext uri="{FF2B5EF4-FFF2-40B4-BE49-F238E27FC236}">
-                <a16:creationId xmlns:a16="http://schemas.microsoft.com/office/drawing/2014/main" id="{608D8355-39F9-A370-4CA2-5B44937DDBC9}"/>
+                <a16:creationId xmlns:a16="http://schemas.microsoft.com/office/drawing/2014/main" id="{E5126355-F20C-B52F-6027-774006E5DD16}"/>
               </a:ext>
             </a:extLst>
           </p:cNvPr>
@@ -2329,7 +2329,7 @@
           <p:cNvPr id="4" name="スライド番号プレースホルダー 3">
             <a:extLst>
               <a:ext uri="{FF2B5EF4-FFF2-40B4-BE49-F238E27FC236}">
-                <a16:creationId xmlns:a16="http://schemas.microsoft.com/office/drawing/2014/main" id="{7A226EC8-121E-0C5D-9C31-E6B1317F370D}"/>
+                <a16:creationId xmlns:a16="http://schemas.microsoft.com/office/drawing/2014/main" id="{776E8F96-1B1F-21F7-4F8A-A450907B9EE3}"/>
               </a:ext>
             </a:extLst>
           </p:cNvPr>
@@ -2345,7 +2345,7 @@
           <a:bodyPr/>
           <a:lstStyle/>
           <a:p>
-            <a:fld id="{2E95919E-94EC-4842-A925-71DBD672C39D}" type="slidenum">
+            <a:fld id="{FF1755AD-8A0F-43D9-9541-8FD2B9F1105B}" type="slidenum">
               <a:rPr kumimoji="1" lang="ja-JP" altLang="en-US" smtClean="0"/>
               <a:t>‹#›</a:t>
             </a:fld>
@@ -2356,7 +2356,7 @@
     </p:spTree>
     <p:extLst>
       <p:ext uri="{BB962C8B-B14F-4D97-AF65-F5344CB8AC3E}">
-        <p14:creationId xmlns:p14="http://schemas.microsoft.com/office/powerpoint/2010/main" val="374036803"/>
+        <p14:creationId xmlns:p14="http://schemas.microsoft.com/office/powerpoint/2010/main" val="178642067"/>
       </p:ext>
     </p:extLst>
   </p:cSld>
@@ -2388,7 +2388,7 @@
           <p:cNvPr id="2" name="タイトル 1">
             <a:extLst>
               <a:ext uri="{FF2B5EF4-FFF2-40B4-BE49-F238E27FC236}">
-                <a16:creationId xmlns:a16="http://schemas.microsoft.com/office/drawing/2014/main" id="{CFD421C3-90FA-FC4C-0C25-1D08146153B5}"/>
+                <a16:creationId xmlns:a16="http://schemas.microsoft.com/office/drawing/2014/main" id="{F97F7D0D-2148-705B-4296-D4311F6C80D1}"/>
               </a:ext>
             </a:extLst>
           </p:cNvPr>
@@ -2425,7 +2425,7 @@
           <p:cNvPr id="3" name="コンテンツ プレースホルダー 2">
             <a:extLst>
               <a:ext uri="{FF2B5EF4-FFF2-40B4-BE49-F238E27FC236}">
-                <a16:creationId xmlns:a16="http://schemas.microsoft.com/office/drawing/2014/main" id="{181910BE-0282-D57E-E8DF-A16A1E9425C6}"/>
+                <a16:creationId xmlns:a16="http://schemas.microsoft.com/office/drawing/2014/main" id="{BDBA7F2F-320F-EC3E-AF25-BFDF58FFBE9F}"/>
               </a:ext>
             </a:extLst>
           </p:cNvPr>
@@ -2547,7 +2547,7 @@
           <p:cNvPr id="4" name="テキスト プレースホルダー 3">
             <a:extLst>
               <a:ext uri="{FF2B5EF4-FFF2-40B4-BE49-F238E27FC236}">
-                <a16:creationId xmlns:a16="http://schemas.microsoft.com/office/drawing/2014/main" id="{DE79E65C-2E82-B82E-FA0B-C2CE6BDD1DFC}"/>
+                <a16:creationId xmlns:a16="http://schemas.microsoft.com/office/drawing/2014/main" id="{E3794B88-A6D4-38DA-6A3F-6B30C7003346}"/>
               </a:ext>
             </a:extLst>
           </p:cNvPr>
@@ -2618,7 +2618,7 @@
           <p:cNvPr id="5" name="日付プレースホルダー 4">
             <a:extLst>
               <a:ext uri="{FF2B5EF4-FFF2-40B4-BE49-F238E27FC236}">
-                <a16:creationId xmlns:a16="http://schemas.microsoft.com/office/drawing/2014/main" id="{1A38B25D-1BD9-C49A-DE9D-E320A6651777}"/>
+                <a16:creationId xmlns:a16="http://schemas.microsoft.com/office/drawing/2014/main" id="{B13D37D1-6D18-77D2-9E96-D524CE1D5BF9}"/>
               </a:ext>
             </a:extLst>
           </p:cNvPr>
@@ -2634,7 +2634,7 @@
           <a:bodyPr/>
           <a:lstStyle/>
           <a:p>
-            <a:fld id="{EC501055-3551-404D-B3E8-8524C3C433BC}" type="datetimeFigureOut">
+            <a:fld id="{E8AAB5B6-4AF6-43E0-B791-96E07B70AB54}" type="datetimeFigureOut">
               <a:rPr kumimoji="1" lang="ja-JP" altLang="en-US" smtClean="0"/>
               <a:t>2026/7/30</a:t>
             </a:fld>
@@ -2647,7 +2647,7 @@
           <p:cNvPr id="6" name="フッター プレースホルダー 5">
             <a:extLst>
               <a:ext uri="{FF2B5EF4-FFF2-40B4-BE49-F238E27FC236}">
-                <a16:creationId xmlns:a16="http://schemas.microsoft.com/office/drawing/2014/main" id="{8DD300E0-7637-29F3-368A-D3DBCC22327D}"/>
+                <a16:creationId xmlns:a16="http://schemas.microsoft.com/office/drawing/2014/main" id="{C556518C-33F9-E5C5-8865-D55DEC1CE3B8}"/>
               </a:ext>
             </a:extLst>
           </p:cNvPr>
@@ -2672,7 +2672,7 @@
           <p:cNvPr id="7" name="スライド番号プレースホルダー 6">
             <a:extLst>
               <a:ext uri="{FF2B5EF4-FFF2-40B4-BE49-F238E27FC236}">
-                <a16:creationId xmlns:a16="http://schemas.microsoft.com/office/drawing/2014/main" id="{F5A93C43-2CE4-DF47-58A1-A4EB8F0F78F1}"/>
+                <a16:creationId xmlns:a16="http://schemas.microsoft.com/office/drawing/2014/main" id="{CBB89BDF-1D08-BD4D-391D-818546F6C712}"/>
               </a:ext>
             </a:extLst>
           </p:cNvPr>
@@ -2688,7 +2688,7 @@
           <a:bodyPr/>
           <a:lstStyle/>
           <a:p>
-            <a:fld id="{2E95919E-94EC-4842-A925-71DBD672C39D}" type="slidenum">
+            <a:fld id="{FF1755AD-8A0F-43D9-9541-8FD2B9F1105B}" type="slidenum">
               <a:rPr kumimoji="1" lang="ja-JP" altLang="en-US" smtClean="0"/>
               <a:t>‹#›</a:t>
             </a:fld>
@@ -2699,7 +2699,7 @@
     </p:spTree>
     <p:extLst>
       <p:ext uri="{BB962C8B-B14F-4D97-AF65-F5344CB8AC3E}">
-        <p14:creationId xmlns:p14="http://schemas.microsoft.com/office/powerpoint/2010/main" val="1463683411"/>
+        <p14:creationId xmlns:p14="http://schemas.microsoft.com/office/powerpoint/2010/main" val="3415403073"/>
       </p:ext>
     </p:extLst>
   </p:cSld>
@@ -2731,7 +2731,7 @@
           <p:cNvPr id="2" name="タイトル 1">
             <a:extLst>
               <a:ext uri="{FF2B5EF4-FFF2-40B4-BE49-F238E27FC236}">
-                <a16:creationId xmlns:a16="http://schemas.microsoft.com/office/drawing/2014/main" id="{D5128191-DA2D-B70A-A43C-1BA986046256}"/>
+                <a16:creationId xmlns:a16="http://schemas.microsoft.com/office/drawing/2014/main" id="{C4734A25-0E67-1BEE-8373-0249DFB8D91C}"/>
               </a:ext>
             </a:extLst>
           </p:cNvPr>
@@ -2768,7 +2768,7 @@
           <p:cNvPr id="3" name="図プレースホルダー 2">
             <a:extLst>
               <a:ext uri="{FF2B5EF4-FFF2-40B4-BE49-F238E27FC236}">
-                <a16:creationId xmlns:a16="http://schemas.microsoft.com/office/drawing/2014/main" id="{B1B8D1BF-B99D-95D2-5E58-469CA6F8FB52}"/>
+                <a16:creationId xmlns:a16="http://schemas.microsoft.com/office/drawing/2014/main" id="{9EF2F524-BCF9-EF10-55F8-38BB5C7A07F2}"/>
               </a:ext>
             </a:extLst>
           </p:cNvPr>
@@ -2835,7 +2835,7 @@
           <p:cNvPr id="4" name="テキスト プレースホルダー 3">
             <a:extLst>
               <a:ext uri="{FF2B5EF4-FFF2-40B4-BE49-F238E27FC236}">
-                <a16:creationId xmlns:a16="http://schemas.microsoft.com/office/drawing/2014/main" id="{CEB93906-B400-F097-4E48-CA55FD7541D7}"/>
+                <a16:creationId xmlns:a16="http://schemas.microsoft.com/office/drawing/2014/main" id="{203B1FF8-67D4-947D-E941-654FB3B73D7C}"/>
               </a:ext>
             </a:extLst>
           </p:cNvPr>
@@ -2906,7 +2906,7 @@
           <p:cNvPr id="5" name="日付プレースホルダー 4">
             <a:extLst>
               <a:ext uri="{FF2B5EF4-FFF2-40B4-BE49-F238E27FC236}">
-                <a16:creationId xmlns:a16="http://schemas.microsoft.com/office/drawing/2014/main" id="{2646C617-11D2-6346-A4FC-7E6DB42918B9}"/>
+                <a16:creationId xmlns:a16="http://schemas.microsoft.com/office/drawing/2014/main" id="{FEE4AD42-C0B8-46EC-6D69-4EA7F94D439B}"/>
               </a:ext>
             </a:extLst>
           </p:cNvPr>
@@ -2922,7 +2922,7 @@
           <a:bodyPr/>
           <a:lstStyle/>
           <a:p>
-            <a:fld id="{EC501055-3551-404D-B3E8-8524C3C433BC}" type="datetimeFigureOut">
+            <a:fld id="{E8AAB5B6-4AF6-43E0-B791-96E07B70AB54}" type="datetimeFigureOut">
               <a:rPr kumimoji="1" lang="ja-JP" altLang="en-US" smtClean="0"/>
               <a:t>2026/7/30</a:t>
             </a:fld>
@@ -2935,7 +2935,7 @@
           <p:cNvPr id="6" name="フッター プレースホルダー 5">
             <a:extLst>
               <a:ext uri="{FF2B5EF4-FFF2-40B4-BE49-F238E27FC236}">
-                <a16:creationId xmlns:a16="http://schemas.microsoft.com/office/drawing/2014/main" id="{D2970049-088D-0B10-F251-A0A96F18F129}"/>
+                <a16:creationId xmlns:a16="http://schemas.microsoft.com/office/drawing/2014/main" id="{0F4058F2-0619-90E9-D1FF-935CB31A730C}"/>
               </a:ext>
             </a:extLst>
           </p:cNvPr>
@@ -2960,7 +2960,7 @@
           <p:cNvPr id="7" name="スライド番号プレースホルダー 6">
             <a:extLst>
               <a:ext uri="{FF2B5EF4-FFF2-40B4-BE49-F238E27FC236}">
-                <a16:creationId xmlns:a16="http://schemas.microsoft.com/office/drawing/2014/main" id="{45B2A7C7-29E6-1EC8-0A0C-4638E4DB718D}"/>
+                <a16:creationId xmlns:a16="http://schemas.microsoft.com/office/drawing/2014/main" id="{F3BEC15F-48A1-EDC9-F6DA-284D0A0C979C}"/>
               </a:ext>
             </a:extLst>
           </p:cNvPr>
@@ -2976,7 +2976,7 @@
           <a:bodyPr/>
           <a:lstStyle/>
           <a:p>
-            <a:fld id="{2E95919E-94EC-4842-A925-71DBD672C39D}" type="slidenum">
+            <a:fld id="{FF1755AD-8A0F-43D9-9541-8FD2B9F1105B}" type="slidenum">
               <a:rPr kumimoji="1" lang="ja-JP" altLang="en-US" smtClean="0"/>
               <a:t>‹#›</a:t>
             </a:fld>
@@ -2987,7 +2987,7 @@
     </p:spTree>
     <p:extLst>
       <p:ext uri="{BB962C8B-B14F-4D97-AF65-F5344CB8AC3E}">
-        <p14:creationId xmlns:p14="http://schemas.microsoft.com/office/powerpoint/2010/main" val="428642217"/>
+        <p14:creationId xmlns:p14="http://schemas.microsoft.com/office/powerpoint/2010/main" val="3902529925"/>
       </p:ext>
     </p:extLst>
   </p:cSld>
@@ -3024,7 +3024,7 @@
           <p:cNvPr id="2" name="タイトル プレースホルダー 1">
             <a:extLst>
               <a:ext uri="{FF2B5EF4-FFF2-40B4-BE49-F238E27FC236}">
-                <a16:creationId xmlns:a16="http://schemas.microsoft.com/office/drawing/2014/main" id="{FBA3439D-ED7F-D1E2-93D9-21FC4EDFBE2C}"/>
+                <a16:creationId xmlns:a16="http://schemas.microsoft.com/office/drawing/2014/main" id="{8A94EA1E-7870-68BD-D6AB-2CC1AE308457}"/>
               </a:ext>
             </a:extLst>
           </p:cNvPr>
@@ -3062,7 +3062,7 @@
           <p:cNvPr id="3" name="テキスト プレースホルダー 2">
             <a:extLst>
               <a:ext uri="{FF2B5EF4-FFF2-40B4-BE49-F238E27FC236}">
-                <a16:creationId xmlns:a16="http://schemas.microsoft.com/office/drawing/2014/main" id="{6F5BBCC6-34EC-90A0-62CE-886FCE57365F}"/>
+                <a16:creationId xmlns:a16="http://schemas.microsoft.com/office/drawing/2014/main" id="{4ADFDA33-C559-F235-1ADF-3A2DAB4DDBF8}"/>
               </a:ext>
             </a:extLst>
           </p:cNvPr>
@@ -3161,7 +3161,7 @@
           <p:cNvPr id="4" name="日付プレースホルダー 3">
             <a:extLst>
               <a:ext uri="{FF2B5EF4-FFF2-40B4-BE49-F238E27FC236}">
-                <a16:creationId xmlns:a16="http://schemas.microsoft.com/office/drawing/2014/main" id="{1683BE24-E4A4-EAF9-2A2F-C930E6F6A7CA}"/>
+                <a16:creationId xmlns:a16="http://schemas.microsoft.com/office/drawing/2014/main" id="{524448B5-0353-72DA-E9D5-D3776534DE60}"/>
               </a:ext>
             </a:extLst>
           </p:cNvPr>
@@ -3195,7 +3195,7 @@
             </a:lvl1pPr>
           </a:lstStyle>
           <a:p>
-            <a:fld id="{EC501055-3551-404D-B3E8-8524C3C433BC}" type="datetimeFigureOut">
+            <a:fld id="{E8AAB5B6-4AF6-43E0-B791-96E07B70AB54}" type="datetimeFigureOut">
               <a:rPr kumimoji="1" lang="ja-JP" altLang="en-US" smtClean="0"/>
               <a:t>2026/7/30</a:t>
             </a:fld>
@@ -3208,7 +3208,7 @@
           <p:cNvPr id="5" name="フッター プレースホルダー 4">
             <a:extLst>
               <a:ext uri="{FF2B5EF4-FFF2-40B4-BE49-F238E27FC236}">
-                <a16:creationId xmlns:a16="http://schemas.microsoft.com/office/drawing/2014/main" id="{73502228-B44F-6672-CFAC-B6A6A74F5426}"/>
+                <a16:creationId xmlns:a16="http://schemas.microsoft.com/office/drawing/2014/main" id="{FDC7B00E-9F54-AEA8-D678-763B780023A0}"/>
               </a:ext>
             </a:extLst>
           </p:cNvPr>
@@ -3251,7 +3251,7 @@
           <p:cNvPr id="6" name="スライド番号プレースホルダー 5">
             <a:extLst>
               <a:ext uri="{FF2B5EF4-FFF2-40B4-BE49-F238E27FC236}">
-                <a16:creationId xmlns:a16="http://schemas.microsoft.com/office/drawing/2014/main" id="{3AB0F728-FCF8-CECD-EA00-2D0E5A4A1D69}"/>
+                <a16:creationId xmlns:a16="http://schemas.microsoft.com/office/drawing/2014/main" id="{A42455B9-BD0A-81AF-9B66-F1D06594FD56}"/>
               </a:ext>
             </a:extLst>
           </p:cNvPr>
@@ -3285,7 +3285,7 @@
             </a:lvl1pPr>
           </a:lstStyle>
           <a:p>
-            <a:fld id="{2E95919E-94EC-4842-A925-71DBD672C39D}" type="slidenum">
+            <a:fld id="{FF1755AD-8A0F-43D9-9541-8FD2B9F1105B}" type="slidenum">
               <a:rPr kumimoji="1" lang="ja-JP" altLang="en-US" smtClean="0"/>
               <a:t>‹#›</a:t>
             </a:fld>
@@ -3296,7 +3296,7 @@
     </p:spTree>
     <p:extLst>
       <p:ext uri="{BB962C8B-B14F-4D97-AF65-F5344CB8AC3E}">
-        <p14:creationId xmlns:p14="http://schemas.microsoft.com/office/powerpoint/2010/main" val="1587370853"/>
+        <p14:creationId xmlns:p14="http://schemas.microsoft.com/office/powerpoint/2010/main" val="4276976788"/>
       </p:ext>
     </p:extLst>
   </p:cSld>
@@ -3619,7 +3619,7 @@
           <p:cNvPr id="2" name="テキスト ボックス 1">
             <a:extLst>
               <a:ext uri="{FF2B5EF4-FFF2-40B4-BE49-F238E27FC236}">
-                <a16:creationId xmlns:a16="http://schemas.microsoft.com/office/drawing/2014/main" id="{9A628D50-CEF9-2433-06A7-99BDC258932D}"/>
+                <a16:creationId xmlns:a16="http://schemas.microsoft.com/office/drawing/2014/main" id="{B39801AC-D650-5C53-3C96-3DB97D5BD5C7}"/>
               </a:ext>
             </a:extLst>
           </p:cNvPr>
@@ -3665,7 +3665,7 @@
           <p:cNvPr id="3" name="テキスト ボックス 2">
             <a:extLst>
               <a:ext uri="{FF2B5EF4-FFF2-40B4-BE49-F238E27FC236}">
-                <a16:creationId xmlns:a16="http://schemas.microsoft.com/office/drawing/2014/main" id="{79496676-3EC8-51B6-9330-046DCB38691D}"/>
+                <a16:creationId xmlns:a16="http://schemas.microsoft.com/office/drawing/2014/main" id="{F1C13438-60B0-2D0D-CA5F-70AB718EF253}"/>
               </a:ext>
             </a:extLst>
           </p:cNvPr>
@@ -3714,7 +3714,7 @@
           <p:cNvPr id="4" name="テキスト ボックス 3">
             <a:extLst>
               <a:ext uri="{FF2B5EF4-FFF2-40B4-BE49-F238E27FC236}">
-                <a16:creationId xmlns:a16="http://schemas.microsoft.com/office/drawing/2014/main" id="{0FC1768D-7987-D18C-B3C5-55E438147640}"/>
+                <a16:creationId xmlns:a16="http://schemas.microsoft.com/office/drawing/2014/main" id="{7D9B0378-F66D-CF20-829B-FB8538095E02}"/>
               </a:ext>
             </a:extLst>
           </p:cNvPr>
@@ -3754,7 +3754,7 @@
           <p:cNvPr id="5" name="テキスト ボックス 4">
             <a:extLst>
               <a:ext uri="{FF2B5EF4-FFF2-40B4-BE49-F238E27FC236}">
-                <a16:creationId xmlns:a16="http://schemas.microsoft.com/office/drawing/2014/main" id="{6A05B75C-2A6C-0CCB-4ACB-2343F0C14032}"/>
+                <a16:creationId xmlns:a16="http://schemas.microsoft.com/office/drawing/2014/main" id="{8D60F1FF-85B9-30E6-DF87-AE16E1BB1E2D}"/>
               </a:ext>
             </a:extLst>
           </p:cNvPr>
@@ -3801,7 +3801,7 @@
             <a:hlinkClick r:id="" action="ppaction://media"/>
             <a:extLst>
               <a:ext uri="{FF2B5EF4-FFF2-40B4-BE49-F238E27FC236}">
-                <a16:creationId xmlns:a16="http://schemas.microsoft.com/office/drawing/2014/main" id="{98B98754-8784-4FEA-F641-2772F27B1B39}"/>
+                <a16:creationId xmlns:a16="http://schemas.microsoft.com/office/drawing/2014/main" id="{0F04EE87-1D86-6F15-238D-B559569F8D30}"/>
               </a:ext>
             </a:extLst>
           </p:cNvPr>
@@ -3836,7 +3836,7 @@
     </p:spTree>
     <p:extLst>
       <p:ext uri="{BB962C8B-B14F-4D97-AF65-F5344CB8AC3E}">
-        <p14:creationId xmlns:p14="http://schemas.microsoft.com/office/powerpoint/2010/main" val="1637555996"/>
+        <p14:creationId xmlns:p14="http://schemas.microsoft.com/office/powerpoint/2010/main" val="3256438266"/>
       </p:ext>
     </p:extLst>
   </p:cSld>
@@ -3960,7 +3960,7 @@
           <p:cNvPr id="2" name="テキスト ボックス 1">
             <a:extLst>
               <a:ext uri="{FF2B5EF4-FFF2-40B4-BE49-F238E27FC236}">
-                <a16:creationId xmlns:a16="http://schemas.microsoft.com/office/drawing/2014/main" id="{2DF42755-5304-3E94-7496-77130D39922C}"/>
+                <a16:creationId xmlns:a16="http://schemas.microsoft.com/office/drawing/2014/main" id="{8BE900DF-1944-A9BB-F58F-B6B33E0A16F5}"/>
               </a:ext>
             </a:extLst>
           </p:cNvPr>
@@ -4006,7 +4006,7 @@
           <p:cNvPr id="3" name="テキスト ボックス 2">
             <a:extLst>
               <a:ext uri="{FF2B5EF4-FFF2-40B4-BE49-F238E27FC236}">
-                <a16:creationId xmlns:a16="http://schemas.microsoft.com/office/drawing/2014/main" id="{943DB154-5022-CD96-8D0A-D7E6FACF9A5A}"/>
+                <a16:creationId xmlns:a16="http://schemas.microsoft.com/office/drawing/2014/main" id="{E604678F-2C00-5B94-D9E0-B08F517CD4CE}"/>
               </a:ext>
             </a:extLst>
           </p:cNvPr>
@@ -4046,7 +4046,7 @@
           <p:cNvPr id="4" name="テキスト ボックス 3">
             <a:extLst>
               <a:ext uri="{FF2B5EF4-FFF2-40B4-BE49-F238E27FC236}">
-                <a16:creationId xmlns:a16="http://schemas.microsoft.com/office/drawing/2014/main" id="{B288A715-EC32-FF65-0C25-620F5C951B96}"/>
+                <a16:creationId xmlns:a16="http://schemas.microsoft.com/office/drawing/2014/main" id="{20F5C25F-5554-9CE7-F96A-5A3EF79FDA80}"/>
               </a:ext>
             </a:extLst>
           </p:cNvPr>
@@ -4095,7 +4095,7 @@
           <p:cNvPr id="5" name="テキスト ボックス 4">
             <a:extLst>
               <a:ext uri="{FF2B5EF4-FFF2-40B4-BE49-F238E27FC236}">
-                <a16:creationId xmlns:a16="http://schemas.microsoft.com/office/drawing/2014/main" id="{6BC2597E-1998-C76B-9989-59605C283C03}"/>
+                <a16:creationId xmlns:a16="http://schemas.microsoft.com/office/drawing/2014/main" id="{5E8BFFD1-9727-5EF2-8657-7D76663B4C1F}"/>
               </a:ext>
             </a:extLst>
           </p:cNvPr>
@@ -4142,7 +4142,7 @@
             <a:hlinkClick r:id="" action="ppaction://media"/>
             <a:extLst>
               <a:ext uri="{FF2B5EF4-FFF2-40B4-BE49-F238E27FC236}">
-                <a16:creationId xmlns:a16="http://schemas.microsoft.com/office/drawing/2014/main" id="{F0767AEC-481C-4788-B29A-C1A6FC7E0646}"/>
+                <a16:creationId xmlns:a16="http://schemas.microsoft.com/office/drawing/2014/main" id="{99120661-E33F-DDDE-ED97-AC7852F3EA60}"/>
               </a:ext>
             </a:extLst>
           </p:cNvPr>
@@ -4177,7 +4177,7 @@
     </p:spTree>
     <p:extLst>
       <p:ext uri="{BB962C8B-B14F-4D97-AF65-F5344CB8AC3E}">
-        <p14:creationId xmlns:p14="http://schemas.microsoft.com/office/powerpoint/2010/main" val="1620560820"/>
+        <p14:creationId xmlns:p14="http://schemas.microsoft.com/office/powerpoint/2010/main" val="1418957591"/>
       </p:ext>
     </p:extLst>
   </p:cSld>
@@ -4301,7 +4301,7 @@
           <p:cNvPr id="2" name="テキスト ボックス 1">
             <a:extLst>
               <a:ext uri="{FF2B5EF4-FFF2-40B4-BE49-F238E27FC236}">
-                <a16:creationId xmlns:a16="http://schemas.microsoft.com/office/drawing/2014/main" id="{8A23D747-6D5C-FE5F-7378-39587933EB24}"/>
+                <a16:creationId xmlns:a16="http://schemas.microsoft.com/office/drawing/2014/main" id="{0F746DBC-383F-AEC2-E1D9-7C431C890E59}"/>
               </a:ext>
             </a:extLst>
           </p:cNvPr>
@@ -4347,7 +4347,7 @@
           <p:cNvPr id="3" name="テキスト ボックス 2">
             <a:extLst>
               <a:ext uri="{FF2B5EF4-FFF2-40B4-BE49-F238E27FC236}">
-                <a16:creationId xmlns:a16="http://schemas.microsoft.com/office/drawing/2014/main" id="{B4C6FD31-0A5A-14BB-FEA0-C31902357C95}"/>
+                <a16:creationId xmlns:a16="http://schemas.microsoft.com/office/drawing/2014/main" id="{A29AD75D-78F2-5BCE-1CA5-0C0DE59CF2C6}"/>
               </a:ext>
             </a:extLst>
           </p:cNvPr>
@@ -4387,7 +4387,7 @@
           <p:cNvPr id="4" name="テキスト ボックス 3">
             <a:extLst>
               <a:ext uri="{FF2B5EF4-FFF2-40B4-BE49-F238E27FC236}">
-                <a16:creationId xmlns:a16="http://schemas.microsoft.com/office/drawing/2014/main" id="{A392ADDB-27FD-5927-C1CB-218EF7BF4CD8}"/>
+                <a16:creationId xmlns:a16="http://schemas.microsoft.com/office/drawing/2014/main" id="{B9EE10AA-42F0-EF9D-F021-13197CC9E006}"/>
               </a:ext>
             </a:extLst>
           </p:cNvPr>
@@ -4428,7 +4428,7 @@
           <p:cNvPr id="5" name="テキスト ボックス 4">
             <a:extLst>
               <a:ext uri="{FF2B5EF4-FFF2-40B4-BE49-F238E27FC236}">
-                <a16:creationId xmlns:a16="http://schemas.microsoft.com/office/drawing/2014/main" id="{6F746E25-569C-D19B-BAE5-8163E0F510F9}"/>
+                <a16:creationId xmlns:a16="http://schemas.microsoft.com/office/drawing/2014/main" id="{69712674-358A-00EF-53D6-0D9B876768AE}"/>
               </a:ext>
             </a:extLst>
           </p:cNvPr>
@@ -4475,7 +4475,7 @@
             <a:hlinkClick r:id="" action="ppaction://media"/>
             <a:extLst>
               <a:ext uri="{FF2B5EF4-FFF2-40B4-BE49-F238E27FC236}">
-                <a16:creationId xmlns:a16="http://schemas.microsoft.com/office/drawing/2014/main" id="{BD662783-E244-0CDE-E159-8A8281BB63FA}"/>
+                <a16:creationId xmlns:a16="http://schemas.microsoft.com/office/drawing/2014/main" id="{8CF786B0-16C4-9C97-9B62-06BBA40C8428}"/>
               </a:ext>
             </a:extLst>
           </p:cNvPr>
@@ -4510,7 +4510,7 @@
     </p:spTree>
     <p:extLst>
       <p:ext uri="{BB962C8B-B14F-4D97-AF65-F5344CB8AC3E}">
-        <p14:creationId xmlns:p14="http://schemas.microsoft.com/office/powerpoint/2010/main" val="1197661674"/>
+        <p14:creationId xmlns:p14="http://schemas.microsoft.com/office/powerpoint/2010/main" val="3938856177"/>
       </p:ext>
     </p:extLst>
   </p:cSld>
@@ -4634,7 +4634,7 @@
           <p:cNvPr id="2" name="テキスト ボックス 1">
             <a:extLst>
               <a:ext uri="{FF2B5EF4-FFF2-40B4-BE49-F238E27FC236}">
-                <a16:creationId xmlns:a16="http://schemas.microsoft.com/office/drawing/2014/main" id="{D3D26F27-F697-342D-C4A8-97FD292BB2FB}"/>
+                <a16:creationId xmlns:a16="http://schemas.microsoft.com/office/drawing/2014/main" id="{A33AB1B3-C63A-2B44-F2C5-01C30B151A14}"/>
               </a:ext>
             </a:extLst>
           </p:cNvPr>
@@ -4680,7 +4680,7 @@
           <p:cNvPr id="3" name="テキスト ボックス 2">
             <a:extLst>
               <a:ext uri="{FF2B5EF4-FFF2-40B4-BE49-F238E27FC236}">
-                <a16:creationId xmlns:a16="http://schemas.microsoft.com/office/drawing/2014/main" id="{5DF03B0F-D9B2-0300-B1DD-461A72AB70A6}"/>
+                <a16:creationId xmlns:a16="http://schemas.microsoft.com/office/drawing/2014/main" id="{D399652F-B60A-EC63-B92F-35D1CE8CA947}"/>
               </a:ext>
             </a:extLst>
           </p:cNvPr>
@@ -4720,7 +4720,7 @@
           <p:cNvPr id="4" name="テキスト ボックス 3">
             <a:extLst>
               <a:ext uri="{FF2B5EF4-FFF2-40B4-BE49-F238E27FC236}">
-                <a16:creationId xmlns:a16="http://schemas.microsoft.com/office/drawing/2014/main" id="{AA81B3EA-5EC4-BEDC-89EB-D52108F50C0B}"/>
+                <a16:creationId xmlns:a16="http://schemas.microsoft.com/office/drawing/2014/main" id="{CD53D375-561F-0CCE-8E7D-4B906DE6C2A7}"/>
               </a:ext>
             </a:extLst>
           </p:cNvPr>
@@ -4779,7 +4779,7 @@
           <p:cNvPr id="5" name="テキスト ボックス 4">
             <a:extLst>
               <a:ext uri="{FF2B5EF4-FFF2-40B4-BE49-F238E27FC236}">
-                <a16:creationId xmlns:a16="http://schemas.microsoft.com/office/drawing/2014/main" id="{37DE6F5D-8057-D4A2-0279-46E404CB33CC}"/>
+                <a16:creationId xmlns:a16="http://schemas.microsoft.com/office/drawing/2014/main" id="{016AB9CA-E47A-060B-17B2-844039C9DBB6}"/>
               </a:ext>
             </a:extLst>
           </p:cNvPr>
@@ -4826,7 +4826,7 @@
             <a:hlinkClick r:id="" action="ppaction://media"/>
             <a:extLst>
               <a:ext uri="{FF2B5EF4-FFF2-40B4-BE49-F238E27FC236}">
-                <a16:creationId xmlns:a16="http://schemas.microsoft.com/office/drawing/2014/main" id="{E3174EEF-9B65-8A91-6918-E1B8838415AE}"/>
+                <a16:creationId xmlns:a16="http://schemas.microsoft.com/office/drawing/2014/main" id="{3F6AFB63-4E17-4BDE-0D8A-61F5D15F49B8}"/>
               </a:ext>
             </a:extLst>
           </p:cNvPr>
@@ -4861,7 +4861,7 @@
     </p:spTree>
     <p:extLst>
       <p:ext uri="{BB962C8B-B14F-4D97-AF65-F5344CB8AC3E}">
-        <p14:creationId xmlns:p14="http://schemas.microsoft.com/office/powerpoint/2010/main" val="2799690434"/>
+        <p14:creationId xmlns:p14="http://schemas.microsoft.com/office/powerpoint/2010/main" val="2243327627"/>
       </p:ext>
     </p:extLst>
   </p:cSld>
@@ -4985,7 +4985,7 @@
           <p:cNvPr id="2" name="テキスト ボックス 1">
             <a:extLst>
               <a:ext uri="{FF2B5EF4-FFF2-40B4-BE49-F238E27FC236}">
-                <a16:creationId xmlns:a16="http://schemas.microsoft.com/office/drawing/2014/main" id="{EC07681D-9FBC-8168-3D2C-6DF3CA07A141}"/>
+                <a16:creationId xmlns:a16="http://schemas.microsoft.com/office/drawing/2014/main" id="{39D7D8F8-6AD2-365C-5B5F-1CD7D855A6B5}"/>
               </a:ext>
             </a:extLst>
           </p:cNvPr>
@@ -5031,7 +5031,7 @@
           <p:cNvPr id="3" name="テキスト ボックス 2">
             <a:extLst>
               <a:ext uri="{FF2B5EF4-FFF2-40B4-BE49-F238E27FC236}">
-                <a16:creationId xmlns:a16="http://schemas.microsoft.com/office/drawing/2014/main" id="{E0DBF480-5A1C-0913-5F0E-D991BFFD16E3}"/>
+                <a16:creationId xmlns:a16="http://schemas.microsoft.com/office/drawing/2014/main" id="{75BB0B07-8BF2-1EE0-9095-3095DC40830D}"/>
               </a:ext>
             </a:extLst>
           </p:cNvPr>
@@ -5071,7 +5071,7 @@
           <p:cNvPr id="4" name="テキスト ボックス 3">
             <a:extLst>
               <a:ext uri="{FF2B5EF4-FFF2-40B4-BE49-F238E27FC236}">
-                <a16:creationId xmlns:a16="http://schemas.microsoft.com/office/drawing/2014/main" id="{EBAFE480-44AE-7185-7784-C4F2C906B2BD}"/>
+                <a16:creationId xmlns:a16="http://schemas.microsoft.com/office/drawing/2014/main" id="{790264BE-B9ED-4B09-7967-CD21C702CDBA}"/>
               </a:ext>
             </a:extLst>
           </p:cNvPr>
@@ -5095,20 +5095,14 @@
           <a:lstStyle/>
           <a:p>
             <a:r>
-              <a:rPr kumimoji="1" lang="en-US" altLang="ja-JP" sz="2000">
+              <a:rPr kumimoji="1" lang="ja-JP" altLang="en-US" sz="2000">
                 <a:solidFill>
                   <a:srgbClr val="333333"/>
                 </a:solidFill>
                 <a:latin typeface="Arial" panose="020B0604020202020204" pitchFamily="34" charset="0"/>
               </a:rPr>
-              <a:t>Initialize repository</a:t>
-            </a:r>
-            <a:endParaRPr kumimoji="1" lang="ja-JP" altLang="en-US" sz="2000">
-              <a:solidFill>
-                <a:srgbClr val="333333"/>
-              </a:solidFill>
-              <a:latin typeface="Arial" panose="020B0604020202020204" pitchFamily="34" charset="0"/>
-            </a:endParaRPr>
+              <a:t>直近のコミットでは、プロジェクトの初期構成と開発基盤が整備されました。</a:t>
+            </a:r>
           </a:p>
         </p:txBody>
       </p:sp>
@@ -5117,7 +5111,7 @@
           <p:cNvPr id="5" name="テキスト ボックス 4">
             <a:extLst>
               <a:ext uri="{FF2B5EF4-FFF2-40B4-BE49-F238E27FC236}">
-                <a16:creationId xmlns:a16="http://schemas.microsoft.com/office/drawing/2014/main" id="{4E836E60-2756-E5E4-FA43-652097174617}"/>
+                <a16:creationId xmlns:a16="http://schemas.microsoft.com/office/drawing/2014/main" id="{1A4B9A32-E94F-8972-2338-088ECD8AF660}"/>
               </a:ext>
             </a:extLst>
           </p:cNvPr>
@@ -5164,7 +5158,7 @@
             <a:hlinkClick r:id="" action="ppaction://media"/>
             <a:extLst>
               <a:ext uri="{FF2B5EF4-FFF2-40B4-BE49-F238E27FC236}">
-                <a16:creationId xmlns:a16="http://schemas.microsoft.com/office/drawing/2014/main" id="{B684F25A-64EF-78F3-6CBD-5699ECEDE6B6}"/>
+                <a16:creationId xmlns:a16="http://schemas.microsoft.com/office/drawing/2014/main" id="{FA8EE220-88BE-9214-35C6-1FCFC47B90D8}"/>
               </a:ext>
             </a:extLst>
           </p:cNvPr>
@@ -5199,7 +5193,7 @@
     </p:spTree>
     <p:extLst>
       <p:ext uri="{BB962C8B-B14F-4D97-AF65-F5344CB8AC3E}">
-        <p14:creationId xmlns:p14="http://schemas.microsoft.com/office/powerpoint/2010/main" val="4262109297"/>
+        <p14:creationId xmlns:p14="http://schemas.microsoft.com/office/powerpoint/2010/main" val="2415813006"/>
       </p:ext>
     </p:extLst>
   </p:cSld>
@@ -5208,10 +5202,10 @@
   </p:clrMapOvr>
   <mc:AlternateContent xmlns:mc="http://schemas.openxmlformats.org/markup-compatibility/2006">
     <mc:Choice xmlns:p14="http://schemas.microsoft.com/office/powerpoint/2010/main" Requires="p14">
-      <p:transition spd="slow" p14:dur="2000" advTm="6000"/>
+      <p:transition spd="slow" p14:dur="2000" advTm="7000"/>
     </mc:Choice>
     <mc:Fallback>
-      <p:transition spd="slow" advTm="6000"/>
+      <p:transition spd="slow" advTm="7000"/>
     </mc:Fallback>
   </mc:AlternateContent>
   <p:timing>
@@ -5242,7 +5236,7 @@
                                   <p:childTnLst>
                                     <p:cmd type="call" cmd="playFrom(0.0)">
                                       <p:cBhvr>
-                                        <p:cTn id="6" dur="5687" fill="hold"/>
+                                        <p:cTn id="6" dur="6126" fill="hold"/>
                                         <p:tgtEl>
                                           <p:spTgt spid="6"/>
                                         </p:tgtEl>
@@ -5323,7 +5317,7 @@
           <p:cNvPr id="2" name="テキスト ボックス 1">
             <a:extLst>
               <a:ext uri="{FF2B5EF4-FFF2-40B4-BE49-F238E27FC236}">
-                <a16:creationId xmlns:a16="http://schemas.microsoft.com/office/drawing/2014/main" id="{6E94F900-162C-3600-3449-D27C98B0A68C}"/>
+                <a16:creationId xmlns:a16="http://schemas.microsoft.com/office/drawing/2014/main" id="{A7C947D1-2582-925F-B901-E1CBBB652D2B}"/>
               </a:ext>
             </a:extLst>
           </p:cNvPr>
@@ -5369,7 +5363,7 @@
           <p:cNvPr id="3" name="テキスト ボックス 2">
             <a:extLst>
               <a:ext uri="{FF2B5EF4-FFF2-40B4-BE49-F238E27FC236}">
-                <a16:creationId xmlns:a16="http://schemas.microsoft.com/office/drawing/2014/main" id="{EAE6D581-CA74-84AA-5173-EA55A9C1EA61}"/>
+                <a16:creationId xmlns:a16="http://schemas.microsoft.com/office/drawing/2014/main" id="{82368D7D-5219-575F-52B9-C03B11EFCAA1}"/>
               </a:ext>
             </a:extLst>
           </p:cNvPr>
@@ -5409,7 +5403,7 @@
           <p:cNvPr id="4" name="テキスト ボックス 3">
             <a:extLst>
               <a:ext uri="{FF2B5EF4-FFF2-40B4-BE49-F238E27FC236}">
-                <a16:creationId xmlns:a16="http://schemas.microsoft.com/office/drawing/2014/main" id="{9CEE04CF-2AEB-DD1A-6080-BE36B866DBBE}"/>
+                <a16:creationId xmlns:a16="http://schemas.microsoft.com/office/drawing/2014/main" id="{8B668690-FB27-837E-4913-E09BBCA2EF90}"/>
               </a:ext>
             </a:extLst>
           </p:cNvPr>
@@ -5474,7 +5468,7 @@
           <p:cNvPr id="5" name="テキスト ボックス 4">
             <a:extLst>
               <a:ext uri="{FF2B5EF4-FFF2-40B4-BE49-F238E27FC236}">
-                <a16:creationId xmlns:a16="http://schemas.microsoft.com/office/drawing/2014/main" id="{2F4C6FDB-A7F0-FF77-0160-F4E469FD24D0}"/>
+                <a16:creationId xmlns:a16="http://schemas.microsoft.com/office/drawing/2014/main" id="{A5DE6EEC-AF50-1F75-BE5C-4F4A2140B70A}"/>
               </a:ext>
             </a:extLst>
           </p:cNvPr>
@@ -5521,7 +5515,7 @@
             <a:hlinkClick r:id="" action="ppaction://media"/>
             <a:extLst>
               <a:ext uri="{FF2B5EF4-FFF2-40B4-BE49-F238E27FC236}">
-                <a16:creationId xmlns:a16="http://schemas.microsoft.com/office/drawing/2014/main" id="{BE192954-C130-A115-BFE0-92D40C775ED0}"/>
+                <a16:creationId xmlns:a16="http://schemas.microsoft.com/office/drawing/2014/main" id="{81F8CEAC-A97A-E67F-224D-AE5D2C67D528}"/>
               </a:ext>
             </a:extLst>
           </p:cNvPr>
@@ -5556,7 +5550,7 @@
     </p:spTree>
     <p:extLst>
       <p:ext uri="{BB962C8B-B14F-4D97-AF65-F5344CB8AC3E}">
-        <p14:creationId xmlns:p14="http://schemas.microsoft.com/office/powerpoint/2010/main" val="2164465442"/>
+        <p14:creationId xmlns:p14="http://schemas.microsoft.com/office/powerpoint/2010/main" val="3305833814"/>
       </p:ext>
     </p:extLst>
   </p:cSld>
